--- a/knf/decks/d3p8.pptx
+++ b/knf/decks/d3p8.pptx
@@ -5634,7 +5634,7 @@
                 <a:ea typeface="Pretendard"/>
                 <a:cs typeface="Pretendard"/>
               </a:rPr>
-              <a:t>45분 뒤에는</a:t>
+              <a:t>50분 뒤에는</a:t>
             </a:r>
           </a:p>
         </p:txBody>

--- a/knf/decks/d3p8.pptx
+++ b/knf/decks/d3p8.pptx
@@ -3100,7 +3100,7 @@
       <p:grpSpPr/>
       <p:sp>
         <p:nvSpPr>
-          <p:cNvPr id="2" name="Oval 1"/>
+          <p:cNvPr id="2" name="deckgen:decor"/>
           <p:cNvSpPr/>
           <p:nvPr/>
         </p:nvSpPr>
@@ -3130,7 +3130,7 @@
       </p:sp>
       <p:sp>
         <p:nvSpPr>
-          <p:cNvPr id="3" name="Oval 2"/>
+          <p:cNvPr id="3" name="deckgen:decor"/>
           <p:cNvSpPr/>
           <p:nvPr/>
         </p:nvSpPr>
@@ -3160,7 +3160,7 @@
       </p:sp>
       <p:sp>
         <p:nvSpPr>
-          <p:cNvPr id="4" name="Oval 3"/>
+          <p:cNvPr id="4" name="deckgen:decor"/>
           <p:cNvSpPr/>
           <p:nvPr/>
         </p:nvSpPr>
@@ -3190,7 +3190,7 @@
       </p:sp>
       <p:sp>
         <p:nvSpPr>
-          <p:cNvPr id="5" name="Rectangle 4"/>
+          <p:cNvPr id="5" name="deckgen:decor"/>
           <p:cNvSpPr/>
           <p:nvPr/>
         </p:nvSpPr>
@@ -3220,7 +3220,7 @@
       </p:sp>
       <p:sp>
         <p:nvSpPr>
-          <p:cNvPr id="6" name="Oval 5"/>
+          <p:cNvPr id="6" name="deckgen:decor"/>
           <p:cNvSpPr/>
           <p:nvPr/>
         </p:nvSpPr>
@@ -3250,7 +3250,7 @@
       </p:sp>
       <p:sp>
         <p:nvSpPr>
-          <p:cNvPr id="7" name="Oval 6"/>
+          <p:cNvPr id="7" name="deckgen:decor"/>
           <p:cNvSpPr/>
           <p:nvPr/>
         </p:nvSpPr>
@@ -3280,7 +3280,7 @@
       </p:sp>
       <p:sp>
         <p:nvSpPr>
-          <p:cNvPr id="8" name="Oval 7"/>
+          <p:cNvPr id="8" name="deckgen:decor"/>
           <p:cNvSpPr/>
           <p:nvPr/>
         </p:nvSpPr>
@@ -3310,7 +3310,7 @@
       </p:sp>
       <p:sp>
         <p:nvSpPr>
-          <p:cNvPr id="9" name="Oval 8"/>
+          <p:cNvPr id="9" name="deckgen:decor"/>
           <p:cNvSpPr/>
           <p:nvPr/>
         </p:nvSpPr>
@@ -3340,7 +3340,7 @@
       </p:sp>
       <p:sp>
         <p:nvSpPr>
-          <p:cNvPr id="10" name="Rectangle 9"/>
+          <p:cNvPr id="10" name="deckgen:decor"/>
           <p:cNvSpPr/>
           <p:nvPr/>
         </p:nvSpPr>
@@ -3600,7 +3600,7 @@
       <p:grpSpPr/>
       <p:sp>
         <p:nvSpPr>
-          <p:cNvPr id="2" name="Oval 1"/>
+          <p:cNvPr id="2" name="deckgen:decor"/>
           <p:cNvSpPr/>
           <p:nvPr/>
         </p:nvSpPr>
@@ -3630,7 +3630,7 @@
       </p:sp>
       <p:sp>
         <p:nvSpPr>
-          <p:cNvPr id="3" name="Oval 2"/>
+          <p:cNvPr id="3" name="deckgen:decor"/>
           <p:cNvSpPr/>
           <p:nvPr/>
         </p:nvSpPr>
@@ -3660,7 +3660,7 @@
       </p:sp>
       <p:sp>
         <p:nvSpPr>
-          <p:cNvPr id="4" name="Oval 3"/>
+          <p:cNvPr id="4" name="deckgen:decor"/>
           <p:cNvSpPr/>
           <p:nvPr/>
         </p:nvSpPr>
@@ -4662,7 +4662,7 @@
       <p:grpSpPr/>
       <p:sp>
         <p:nvSpPr>
-          <p:cNvPr id="2" name="Oval 1"/>
+          <p:cNvPr id="2" name="deckgen:decor"/>
           <p:cNvSpPr/>
           <p:nvPr/>
         </p:nvSpPr>
@@ -4692,7 +4692,7 @@
       </p:sp>
       <p:sp>
         <p:nvSpPr>
-          <p:cNvPr id="3" name="Oval 2"/>
+          <p:cNvPr id="3" name="deckgen:decor"/>
           <p:cNvSpPr/>
           <p:nvPr/>
         </p:nvSpPr>
@@ -5469,7 +5469,7 @@
       <p:grpSpPr/>
       <p:sp>
         <p:nvSpPr>
-          <p:cNvPr id="2" name="Oval 1"/>
+          <p:cNvPr id="2" name="deckgen:decor"/>
           <p:cNvSpPr/>
           <p:nvPr/>
         </p:nvSpPr>
@@ -5499,7 +5499,7 @@
       </p:sp>
       <p:sp>
         <p:nvSpPr>
-          <p:cNvPr id="3" name="Oval 2"/>
+          <p:cNvPr id="3" name="deckgen:decor"/>
           <p:cNvSpPr/>
           <p:nvPr/>
         </p:nvSpPr>
@@ -5529,7 +5529,7 @@
       </p:sp>
       <p:sp>
         <p:nvSpPr>
-          <p:cNvPr id="4" name="Oval 3"/>
+          <p:cNvPr id="4" name="deckgen:decor"/>
           <p:cNvSpPr/>
           <p:nvPr/>
         </p:nvSpPr>
@@ -6314,7 +6314,7 @@
       <p:grpSpPr/>
       <p:sp>
         <p:nvSpPr>
-          <p:cNvPr id="2" name="Oval 1"/>
+          <p:cNvPr id="2" name="deckgen:decor"/>
           <p:cNvSpPr/>
           <p:nvPr/>
         </p:nvSpPr>
@@ -6344,7 +6344,7 @@
       </p:sp>
       <p:sp>
         <p:nvSpPr>
-          <p:cNvPr id="3" name="Oval 2"/>
+          <p:cNvPr id="3" name="deckgen:decor"/>
           <p:cNvSpPr/>
           <p:nvPr/>
         </p:nvSpPr>
@@ -6374,7 +6374,7 @@
       </p:sp>
       <p:sp>
         <p:nvSpPr>
-          <p:cNvPr id="4" name="Oval 3"/>
+          <p:cNvPr id="4" name="deckgen:decor"/>
           <p:cNvSpPr/>
           <p:nvPr/>
         </p:nvSpPr>
@@ -7688,7 +7688,7 @@
       <p:grpSpPr/>
       <p:sp>
         <p:nvSpPr>
-          <p:cNvPr id="2" name="Oval 1"/>
+          <p:cNvPr id="2" name="deckgen:decor"/>
           <p:cNvSpPr/>
           <p:nvPr/>
         </p:nvSpPr>
@@ -7718,7 +7718,7 @@
       </p:sp>
       <p:sp>
         <p:nvSpPr>
-          <p:cNvPr id="3" name="Oval 2"/>
+          <p:cNvPr id="3" name="deckgen:decor"/>
           <p:cNvSpPr/>
           <p:nvPr/>
         </p:nvSpPr>
@@ -7748,7 +7748,7 @@
       </p:sp>
       <p:sp>
         <p:nvSpPr>
-          <p:cNvPr id="4" name="Oval 3"/>
+          <p:cNvPr id="4" name="deckgen:decor"/>
           <p:cNvSpPr/>
           <p:nvPr/>
         </p:nvSpPr>
@@ -8678,7 +8678,7 @@
       <p:grpSpPr/>
       <p:sp>
         <p:nvSpPr>
-          <p:cNvPr id="2" name="Oval 1"/>
+          <p:cNvPr id="2" name="deckgen:decor"/>
           <p:cNvSpPr/>
           <p:nvPr/>
         </p:nvSpPr>
@@ -8708,7 +8708,7 @@
       </p:sp>
       <p:sp>
         <p:nvSpPr>
-          <p:cNvPr id="3" name="Oval 2"/>
+          <p:cNvPr id="3" name="deckgen:decor"/>
           <p:cNvSpPr/>
           <p:nvPr/>
         </p:nvSpPr>
@@ -8738,7 +8738,7 @@
       </p:sp>
       <p:sp>
         <p:nvSpPr>
-          <p:cNvPr id="4" name="Oval 3"/>
+          <p:cNvPr id="4" name="deckgen:decor"/>
           <p:cNvSpPr/>
           <p:nvPr/>
         </p:nvSpPr>
@@ -9939,7 +9939,7 @@
       <p:grpSpPr/>
       <p:sp>
         <p:nvSpPr>
-          <p:cNvPr id="2" name="Oval 1"/>
+          <p:cNvPr id="2" name="deckgen:decor"/>
           <p:cNvSpPr/>
           <p:nvPr/>
         </p:nvSpPr>
@@ -9969,7 +9969,7 @@
       </p:sp>
       <p:sp>
         <p:nvSpPr>
-          <p:cNvPr id="3" name="Oval 2"/>
+          <p:cNvPr id="3" name="deckgen:decor"/>
           <p:cNvSpPr/>
           <p:nvPr/>
         </p:nvSpPr>
@@ -9999,7 +9999,7 @@
       </p:sp>
       <p:sp>
         <p:nvSpPr>
-          <p:cNvPr id="4" name="Oval 3"/>
+          <p:cNvPr id="4" name="deckgen:decor"/>
           <p:cNvSpPr/>
           <p:nvPr/>
         </p:nvSpPr>
@@ -11609,7 +11609,7 @@
       <p:grpSpPr/>
       <p:sp>
         <p:nvSpPr>
-          <p:cNvPr id="2" name="Oval 1"/>
+          <p:cNvPr id="2" name="deckgen:decor"/>
           <p:cNvSpPr/>
           <p:nvPr/>
         </p:nvSpPr>
@@ -11639,7 +11639,7 @@
       </p:sp>
       <p:sp>
         <p:nvSpPr>
-          <p:cNvPr id="3" name="Oval 2"/>
+          <p:cNvPr id="3" name="deckgen:decor"/>
           <p:cNvSpPr/>
           <p:nvPr/>
         </p:nvSpPr>
@@ -11669,7 +11669,7 @@
       </p:sp>
       <p:sp>
         <p:nvSpPr>
-          <p:cNvPr id="4" name="Oval 3"/>
+          <p:cNvPr id="4" name="deckgen:decor"/>
           <p:cNvSpPr/>
           <p:nvPr/>
         </p:nvSpPr>
@@ -12874,7 +12874,7 @@
       <p:grpSpPr/>
       <p:sp>
         <p:nvSpPr>
-          <p:cNvPr id="2" name="Oval 1"/>
+          <p:cNvPr id="2" name="deckgen:decor"/>
           <p:cNvSpPr/>
           <p:nvPr/>
         </p:nvSpPr>
@@ -12904,7 +12904,7 @@
       </p:sp>
       <p:sp>
         <p:nvSpPr>
-          <p:cNvPr id="3" name="Oval 2"/>
+          <p:cNvPr id="3" name="deckgen:decor"/>
           <p:cNvSpPr/>
           <p:nvPr/>
         </p:nvSpPr>
@@ -12934,7 +12934,7 @@
       </p:sp>
       <p:sp>
         <p:nvSpPr>
-          <p:cNvPr id="4" name="Oval 3"/>
+          <p:cNvPr id="4" name="deckgen:decor"/>
           <p:cNvSpPr/>
           <p:nvPr/>
         </p:nvSpPr>
@@ -14098,7 +14098,7 @@
       <p:grpSpPr/>
       <p:sp>
         <p:nvSpPr>
-          <p:cNvPr id="2" name="Oval 1"/>
+          <p:cNvPr id="2" name="deckgen:decor"/>
           <p:cNvSpPr/>
           <p:nvPr/>
         </p:nvSpPr>
@@ -14128,7 +14128,7 @@
       </p:sp>
       <p:sp>
         <p:nvSpPr>
-          <p:cNvPr id="3" name="Oval 2"/>
+          <p:cNvPr id="3" name="deckgen:decor"/>
           <p:cNvSpPr/>
           <p:nvPr/>
         </p:nvSpPr>
@@ -14158,7 +14158,7 @@
       </p:sp>
       <p:sp>
         <p:nvSpPr>
-          <p:cNvPr id="4" name="Oval 3"/>
+          <p:cNvPr id="4" name="deckgen:decor"/>
           <p:cNvSpPr/>
           <p:nvPr/>
         </p:nvSpPr>
